--- a/public/fun/pack/pptx/weddingpro/결혼식프리미엄_47_러브스토리중심_다크로즈골드.pptx
+++ b/public/fun/pack/pptx/weddingpro/결혼식프리미엄_47_러브스토리중심_다크로즈골드.pptx
@@ -113,12 +113,12 @@
   <p:extLst>
     <p:ext uri="{521415D9-36F7-43E2-AB2F-B90AF26B5E84}">
       <p14:sectionLst xmlns:p14="http://schemas.microsoft.com/office/powerpoint/2010/main">
-        <p14:section name="시작" id="{D1F61D33-127B-4D85-A511-4C53EBAB63EA}">
+        <p14:section name="시작" id="{D00B8FC6-9268-4664-8DBE-EA0546A33C06}">
           <p14:sldIdLst>
             <p14:sldId id="256"/>
           </p14:sldIdLst>
         </p14:section>
-        <p14:section name="본문" id="{03FB2EAC-6D8D-4629-8609-8F0C9100C800}">
+        <p14:section name="본문" id="{8998CCAD-D6F0-4E59-8EBF-FA79B62F6A05}">
           <p14:sldIdLst>
             <p14:sldId id="257"/>
             <p14:sldId id="258"/>
@@ -127,7 +127,7 @@
             <p14:sldId id="261"/>
           </p14:sldIdLst>
         </p14:section>
-        <p14:section name="마무리" id="{65D33449-9210-4B0E-9AC8-25CE9B4BE89C}">
+        <p14:section name="마무리" id="{F0E52FE2-A8CA-4B88-806B-972263AF3C44}">
           <p14:sldIdLst>
             <p14:sldId id="262"/>
           </p14:sldIdLst>
@@ -1543,7 +1543,7 @@
             </a:lvl1pPr>
           </a:lstStyle>
           <a:p>
-            <a:fld id="{78E5E683-6F08-4FD5-93AB-2CAD968AE140}" type="slidenum">
+            <a:fld id="{CA678195-9E51-4C8C-B8B7-FA5784DCDFB6}" type="slidenum">
               <a:rPr lang="en-US"/>
               <a:t>‹#›</a:t>
             </a:fld>
@@ -2186,7 +2186,7 @@
             </a:lvl1pPr>
           </a:lstStyle>
           <a:p>
-            <a:fld id="{92ABFE5A-85D5-4CDD-8D66-16393827CA6F}" type="slidenum">
+            <a:fld id="{1A69D193-1F82-440C-9B4A-7914E5852AF0}" type="slidenum">
               <a:rPr lang="en-US"/>
               <a:t>‹#›</a:t>
             </a:fld>
@@ -2807,7 +2807,7 @@
             </a:lvl1pPr>
           </a:lstStyle>
           <a:p>
-            <a:fld id="{EE6AB7A9-DA7A-47CA-A3AD-C4521D439A54}" type="slidenum">
+            <a:fld id="{38202746-1D9E-4CF5-980D-0E6150660DCA}" type="slidenum">
               <a:rPr lang="en-US"/>
               <a:t>‹#›</a:t>
             </a:fld>
@@ -3638,7 +3638,7 @@
           <a:p>
             <a:r>
               <a:rPr lang="ko-KR"/>
-              <a:t>일 년을 같이 보내고 나서 결심했습니다</a:t>
+              <a:t>오래 같이 지내 보고 결심했습니다</a:t>
             </a:r>
           </a:p>
         </p:txBody>
@@ -3666,7 +3666,7 @@
           <a:p>
             <a:r>
               <a:rPr lang="ko-KR"/>
-              <a:t>0000. 00. 00 · 예식장 이름</a:t>
+              <a:t>날짜 입력 · 예식장 이름</a:t>
             </a:r>
           </a:p>
         </p:txBody>
@@ -3899,7 +3899,7 @@
           <a:bodyPr/>
           <a:lstStyle/>
           <a:p>
-            <a:fld id="{2A252A5A-AD0C-4C8B-9EF6-F02193DB341B}" type="slidenum">
+            <a:fld id="{688446A0-1F63-47F6-8F86-4259E37A2882}" type="slidenum">
               <a:rPr lang="en-US"/>
               <a:t>‹#›</a:t>
             </a:fld>
@@ -4299,7 +4299,7 @@
           <a:bodyPr/>
           <a:lstStyle/>
           <a:p>
-            <a:fld id="{799B1B69-F364-4CC6-B4AB-089DE27AD016}" type="slidenum">
+            <a:fld id="{708E10E3-C595-4572-97C5-7E445D6F92A6}" type="slidenum">
               <a:rPr lang="en-US"/>
               <a:t>‹#›</a:t>
             </a:fld>
@@ -5141,7 +5141,7 @@
           <a:bodyPr/>
           <a:lstStyle/>
           <a:p>
-            <a:fld id="{6F5ABDDA-D8E5-498F-8B6D-3E1376167878}" type="slidenum">
+            <a:fld id="{7E877DAF-54FA-4425-9515-FC7A18E8F2CA}" type="slidenum">
               <a:rPr lang="en-US"/>
               <a:t>‹#›</a:t>
             </a:fld>
@@ -6697,7 +6697,7 @@
           <a:bodyPr/>
           <a:lstStyle/>
           <a:p>
-            <a:fld id="{7BF949BC-1694-48F8-8A61-5508C6770EE5}" type="slidenum">
+            <a:fld id="{120E72B8-BF9C-4602-A85E-20FFE1198A50}" type="slidenum">
               <a:rPr lang="en-US"/>
               <a:t>‹#›</a:t>
             </a:fld>
@@ -6785,7 +6785,7 @@
           <a:bodyPr/>
           <a:lstStyle/>
           <a:p>
-            <a:fld id="{769AFA30-484F-4F90-9761-239E3C137BC9}" type="slidenum">
+            <a:fld id="{C31EBC46-32AF-45E2-9AB7-F2BF9B0C817C}" type="slidenum">
               <a:rPr lang="en-US"/>
               <a:t>‹#›</a:t>
             </a:fld>
